--- a/presentation/demetro_slides.pptx
+++ b/presentation/demetro_slides.pptx
@@ -3126,16 +3126,16 @@
       </p:sp>
       <p:sp>
         <p:nvSpPr>
-          <p:cNvPr id="3" name="Chevron 2"/>
+          <p:cNvPr id="3" name="Pentagon 2"/>
           <p:cNvSpPr/>
           <p:nvPr/>
         </p:nvSpPr>
         <p:spPr>
           <a:xfrm>
             <a:off x="365760" y="914400"/>
-            <a:ext cx="1783080" cy="1005840"/>
-          </a:xfrm>
-          <a:prstGeom prst="chevron">
+            <a:ext cx="2377440" cy="1143000"/>
+          </a:xfrm>
+          <a:prstGeom prst="homePlate">
             <a:avLst/>
           </a:prstGeom>
           <a:solidFill>
@@ -3160,58 +3160,73 @@
           </a:fontRef>
         </p:style>
         <p:txBody>
-          <a:bodyPr rtlCol="0" anchor="ctr" lIns="228600" rIns="137160" tIns="109728" bIns="73152" wrap="square"/>
-          <a:lstStyle/>
-          <a:p>
-            <a:pPr algn="l"/>
-            <a:r>
-              <a:rPr sz="1300" b="1">
+          <a:bodyPr rtlCol="0" anchor="ctr" lIns="164592" rIns="457200" tIns="137160" bIns="91440" wrap="square"/>
+          <a:lstStyle/>
+          <a:p>
+            <a:pPr algn="l">
+              <a:lnSpc>
+                <a:spcPct val="100000"/>
+              </a:lnSpc>
+            </a:pPr>
+            <a:r>
+              <a:rPr sz="1400" b="1">
                 <a:solidFill>
                   <a:srgbClr val="FFFFFF"/>
                 </a:solidFill>
                 <a:latin typeface="Calibri"/>
               </a:rPr>
-              <a:t>Camera Capture</a:t>
-            </a:r>
-          </a:p>
-          <a:p>
-            <a:pPr algn="l"/>
+              <a:t>Camera</a:t>
+            </a:r>
+          </a:p>
+          <a:p>
+            <a:pPr algn="l">
+              <a:lnSpc>
+                <a:spcPct val="100000"/>
+              </a:lnSpc>
+              <a:spcBef>
+                <a:spcPts val="200"/>
+              </a:spcBef>
+            </a:pPr>
+            <a:r>
+              <a:rPr sz="1000" b="0">
+                <a:solidFill>
+                  <a:srgbClr val="FFFFFF"/>
+                </a:solidFill>
+                <a:latin typeface="Calibri"/>
+              </a:rPr>
+              <a:t>1456 x 1088 px</a:t>
+            </a:r>
+          </a:p>
+          <a:p>
+            <a:pPr algn="l">
+              <a:lnSpc>
+                <a:spcPct val="100000"/>
+              </a:lnSpc>
+            </a:pPr>
             <a:r>
               <a:rPr sz="900" b="0">
                 <a:solidFill>
-                  <a:srgbClr val="FFFFFF"/>
-                </a:solidFill>
-                <a:latin typeface="Calibri"/>
-              </a:rPr>
-              <a:t>1456 x 1088 px</a:t>
-            </a:r>
-          </a:p>
-          <a:p>
-            <a:pPr algn="l"/>
-            <a:r>
-              <a:rPr sz="800" b="0">
-                <a:solidFill>
                   <a:srgbClr val="DDE6F0"/>
                 </a:solidFill>
                 <a:latin typeface="Calibri"/>
               </a:rPr>
-              <a:t>IMX296 global shutter</a:t>
-            </a:r>
-          </a:p>
-        </p:txBody>
-      </p:sp>
-      <p:sp>
-        <p:nvSpPr>
-          <p:cNvPr id="4" name="Chevron 3"/>
+              <a:t>Global shutter</a:t>
+            </a:r>
+          </a:p>
+        </p:txBody>
+      </p:sp>
+      <p:sp>
+        <p:nvSpPr>
+          <p:cNvPr id="4" name="Pentagon 3"/>
           <p:cNvSpPr/>
           <p:nvPr/>
         </p:nvSpPr>
         <p:spPr>
           <a:xfrm>
-            <a:off x="1984248" y="914400"/>
-            <a:ext cx="1783080" cy="1005840"/>
-          </a:xfrm>
-          <a:prstGeom prst="chevron">
+            <a:off x="2468880" y="914400"/>
+            <a:ext cx="2377440" cy="1143000"/>
+          </a:xfrm>
+          <a:prstGeom prst="homePlate">
             <a:avLst/>
           </a:prstGeom>
           <a:solidFill>
@@ -3236,58 +3251,73 @@
           </a:fontRef>
         </p:style>
         <p:txBody>
-          <a:bodyPr rtlCol="0" anchor="ctr" lIns="228600" rIns="137160" tIns="109728" bIns="73152" wrap="square"/>
-          <a:lstStyle/>
-          <a:p>
-            <a:pPr algn="l"/>
-            <a:r>
-              <a:rPr sz="1300" b="1">
+          <a:bodyPr rtlCol="0" anchor="ctr" lIns="164592" rIns="457200" tIns="137160" bIns="91440" wrap="square"/>
+          <a:lstStyle/>
+          <a:p>
+            <a:pPr algn="l">
+              <a:lnSpc>
+                <a:spcPct val="100000"/>
+              </a:lnSpc>
+            </a:pPr>
+            <a:r>
+              <a:rPr sz="1400" b="1">
                 <a:solidFill>
                   <a:srgbClr val="FFFFFF"/>
                 </a:solidFill>
                 <a:latin typeface="Calibri"/>
               </a:rPr>
-              <a:t>YOLOv8n Inference</a:t>
-            </a:r>
-          </a:p>
-          <a:p>
-            <a:pPr algn="l"/>
+              <a:t>YOLOv8n</a:t>
+            </a:r>
+          </a:p>
+          <a:p>
+            <a:pPr algn="l">
+              <a:lnSpc>
+                <a:spcPct val="100000"/>
+              </a:lnSpc>
+              <a:spcBef>
+                <a:spcPts val="200"/>
+              </a:spcBef>
+            </a:pPr>
+            <a:r>
+              <a:rPr sz="1000" b="0">
+                <a:solidFill>
+                  <a:srgbClr val="FFFFFF"/>
+                </a:solidFill>
+                <a:latin typeface="Calibri"/>
+              </a:rPr>
+              <a:t>NCNN, 73 ms</a:t>
+            </a:r>
+          </a:p>
+          <a:p>
+            <a:pPr algn="l">
+              <a:lnSpc>
+                <a:spcPct val="100000"/>
+              </a:lnSpc>
+            </a:pPr>
             <a:r>
               <a:rPr sz="900" b="0">
                 <a:solidFill>
-                  <a:srgbClr val="FFFFFF"/>
-                </a:solidFill>
-                <a:latin typeface="Calibri"/>
-              </a:rPr>
-              <a:t>NCNN backend - 73 ms</a:t>
-            </a:r>
-          </a:p>
-          <a:p>
-            <a:pPr algn="l"/>
-            <a:r>
-              <a:rPr sz="800" b="0">
-                <a:solidFill>
                   <a:srgbClr val="DDE6F0"/>
                 </a:solidFill>
                 <a:latin typeface="Calibri"/>
               </a:rPr>
-              <a:t>640x640 input tensor</a:t>
-            </a:r>
-          </a:p>
-        </p:txBody>
-      </p:sp>
-      <p:sp>
-        <p:nvSpPr>
-          <p:cNvPr id="5" name="Chevron 4"/>
+              <a:t>640x640 tensor</a:t>
+            </a:r>
+          </a:p>
+        </p:txBody>
+      </p:sp>
+      <p:sp>
+        <p:nvSpPr>
+          <p:cNvPr id="5" name="Pentagon 4"/>
           <p:cNvSpPr/>
           <p:nvPr/>
         </p:nvSpPr>
         <p:spPr>
           <a:xfrm>
-            <a:off x="3602736" y="914400"/>
-            <a:ext cx="1783080" cy="1005840"/>
-          </a:xfrm>
-          <a:prstGeom prst="chevron">
+            <a:off x="4572000" y="914400"/>
+            <a:ext cx="2377440" cy="1143000"/>
+          </a:xfrm>
+          <a:prstGeom prst="homePlate">
             <a:avLst/>
           </a:prstGeom>
           <a:solidFill>
@@ -3312,12 +3342,16 @@
           </a:fontRef>
         </p:style>
         <p:txBody>
-          <a:bodyPr rtlCol="0" anchor="ctr" lIns="228600" rIns="137160" tIns="109728" bIns="73152" wrap="square"/>
-          <a:lstStyle/>
-          <a:p>
-            <a:pPr algn="l"/>
-            <a:r>
-              <a:rPr sz="1300" b="1">
+          <a:bodyPr rtlCol="0" anchor="ctr" lIns="164592" rIns="457200" tIns="137160" bIns="91440" wrap="square"/>
+          <a:lstStyle/>
+          <a:p>
+            <a:pPr algn="l">
+              <a:lnSpc>
+                <a:spcPct val="100000"/>
+              </a:lnSpc>
+            </a:pPr>
+            <a:r>
+              <a:rPr sz="1400" b="1">
                 <a:solidFill>
                   <a:srgbClr val="FFFFFF"/>
                 </a:solidFill>
@@ -3327,43 +3361,54 @@
             </a:r>
           </a:p>
           <a:p>
-            <a:pPr algn="l"/>
+            <a:pPr algn="l">
+              <a:lnSpc>
+                <a:spcPct val="100000"/>
+              </a:lnSpc>
+              <a:spcBef>
+                <a:spcPts val="200"/>
+              </a:spcBef>
+            </a:pPr>
+            <a:r>
+              <a:rPr sz="1000" b="0">
+                <a:solidFill>
+                  <a:srgbClr val="FFFFFF"/>
+                </a:solidFill>
+                <a:latin typeface="Calibri"/>
+              </a:rPr>
+              <a:t>FOV + altitude</a:t>
+            </a:r>
+          </a:p>
+          <a:p>
+            <a:pPr algn="l">
+              <a:lnSpc>
+                <a:spcPct val="100000"/>
+              </a:lnSpc>
+            </a:pPr>
             <a:r>
               <a:rPr sz="900" b="0">
                 <a:solidFill>
-                  <a:srgbClr val="FFFFFF"/>
-                </a:solidFill>
-                <a:latin typeface="Calibri"/>
-              </a:rPr>
-              <a:t>FOV projection + altitude</a:t>
-            </a:r>
-          </a:p>
-          <a:p>
-            <a:pPr algn="l"/>
-            <a:r>
-              <a:rPr sz="800" b="0">
-                <a:solidFill>
                   <a:srgbClr val="DDE6F0"/>
                 </a:solidFill>
                 <a:latin typeface="Calibri"/>
               </a:rPr>
-              <a:t>Calibrated focal length</a:t>
-            </a:r>
-          </a:p>
-        </p:txBody>
-      </p:sp>
-      <p:sp>
-        <p:nvSpPr>
-          <p:cNvPr id="6" name="Chevron 5"/>
+              <a:t>Ground projection</a:t>
+            </a:r>
+          </a:p>
+        </p:txBody>
+      </p:sp>
+      <p:sp>
+        <p:nvSpPr>
+          <p:cNvPr id="6" name="Pentagon 5"/>
           <p:cNvSpPr/>
           <p:nvPr/>
         </p:nvSpPr>
         <p:spPr>
           <a:xfrm>
-            <a:off x="5221224" y="914400"/>
-            <a:ext cx="1783080" cy="1005840"/>
-          </a:xfrm>
-          <a:prstGeom prst="chevron">
+            <a:off x="6675120" y="914400"/>
+            <a:ext cx="2377440" cy="1143000"/>
+          </a:xfrm>
+          <a:prstGeom prst="homePlate">
             <a:avLst/>
           </a:prstGeom>
           <a:solidFill>
@@ -3388,58 +3433,73 @@
           </a:fontRef>
         </p:style>
         <p:txBody>
-          <a:bodyPr rtlCol="0" anchor="ctr" lIns="228600" rIns="137160" tIns="109728" bIns="73152" wrap="square"/>
-          <a:lstStyle/>
-          <a:p>
-            <a:pPr algn="l"/>
-            <a:r>
-              <a:rPr sz="1300" b="1">
+          <a:bodyPr rtlCol="0" anchor="ctr" lIns="164592" rIns="457200" tIns="137160" bIns="91440" wrap="square"/>
+          <a:lstStyle/>
+          <a:p>
+            <a:pPr algn="l">
+              <a:lnSpc>
+                <a:spcPct val="100000"/>
+              </a:lnSpc>
+            </a:pPr>
+            <a:r>
+              <a:rPr sz="1400" b="1">
                 <a:solidFill>
                   <a:srgbClr val="FFFFFF"/>
                 </a:solidFill>
                 <a:latin typeface="Calibri"/>
               </a:rPr>
-              <a:t>Attitude Correction</a:t>
-            </a:r>
-          </a:p>
-          <a:p>
-            <a:pPr algn="l"/>
+              <a:t>Attitude Fix</a:t>
+            </a:r>
+          </a:p>
+          <a:p>
+            <a:pPr algn="l">
+              <a:lnSpc>
+                <a:spcPct val="100000"/>
+              </a:lnSpc>
+              <a:spcBef>
+                <a:spcPts val="200"/>
+              </a:spcBef>
+            </a:pPr>
+            <a:r>
+              <a:rPr sz="1000" b="0">
+                <a:solidFill>
+                  <a:srgbClr val="FFFFFF"/>
+                </a:solidFill>
+                <a:latin typeface="Calibri"/>
+              </a:rPr>
+              <a:t>Pitch + roll</a:t>
+            </a:r>
+          </a:p>
+          <a:p>
+            <a:pPr algn="l">
+              <a:lnSpc>
+                <a:spcPct val="100000"/>
+              </a:lnSpc>
+            </a:pPr>
             <a:r>
               <a:rPr sz="900" b="0">
                 <a:solidFill>
-                  <a:srgbClr val="FFFFFF"/>
-                </a:solidFill>
-                <a:latin typeface="Calibri"/>
-              </a:rPr>
-              <a:t>Pitch + roll ray-trace</a:t>
-            </a:r>
-          </a:p>
-          <a:p>
-            <a:pPr algn="l"/>
-            <a:r>
-              <a:rPr sz="800" b="0">
-                <a:solidFill>
                   <a:srgbClr val="DDE6F0"/>
                 </a:solidFill>
                 <a:latin typeface="Calibri"/>
               </a:rPr>
-              <a:t>From flight controller</a:t>
-            </a:r>
-          </a:p>
-        </p:txBody>
-      </p:sp>
-      <p:sp>
-        <p:nvSpPr>
-          <p:cNvPr id="7" name="Chevron 6"/>
+              <a:t>Ray-trace from FC</a:t>
+            </a:r>
+          </a:p>
+        </p:txBody>
+      </p:sp>
+      <p:sp>
+        <p:nvSpPr>
+          <p:cNvPr id="7" name="Pentagon 6"/>
           <p:cNvSpPr/>
           <p:nvPr/>
         </p:nvSpPr>
         <p:spPr>
           <a:xfrm>
-            <a:off x="6839712" y="914400"/>
-            <a:ext cx="1783080" cy="1005840"/>
-          </a:xfrm>
-          <a:prstGeom prst="chevron">
+            <a:off x="8778240" y="914400"/>
+            <a:ext cx="2377440" cy="1143000"/>
+          </a:xfrm>
+          <a:prstGeom prst="homePlate">
             <a:avLst/>
           </a:prstGeom>
           <a:solidFill>
@@ -3464,12 +3524,16 @@
           </a:fontRef>
         </p:style>
         <p:txBody>
-          <a:bodyPr rtlCol="0" anchor="ctr" lIns="228600" rIns="137160" tIns="109728" bIns="73152" wrap="square"/>
-          <a:lstStyle/>
-          <a:p>
-            <a:pPr algn="l"/>
-            <a:r>
-              <a:rPr sz="1300" b="1">
+          <a:bodyPr rtlCol="0" anchor="ctr" lIns="164592" rIns="457200" tIns="137160" bIns="91440" wrap="square"/>
+          <a:lstStyle/>
+          <a:p>
+            <a:pPr algn="l">
+              <a:lnSpc>
+                <a:spcPct val="100000"/>
+              </a:lnSpc>
+            </a:pPr>
+            <a:r>
+              <a:rPr sz="1400" b="1">
                 <a:solidFill>
                   <a:srgbClr val="FFFFFF"/>
                 </a:solidFill>
@@ -3479,21 +3543,32 @@
             </a:r>
           </a:p>
           <a:p>
-            <a:pPr algn="l"/>
+            <a:pPr algn="l">
+              <a:lnSpc>
+                <a:spcPct val="100000"/>
+              </a:lnSpc>
+              <a:spcBef>
+                <a:spcPts val="200"/>
+              </a:spcBef>
+            </a:pPr>
+            <a:r>
+              <a:rPr sz="1000" b="0">
+                <a:solidFill>
+                  <a:srgbClr val="FFFFFF"/>
+                </a:solidFill>
+                <a:latin typeface="Calibri"/>
+              </a:rPr>
+              <a:t>~9 FPS effective</a:t>
+            </a:r>
+          </a:p>
+          <a:p>
+            <a:pPr algn="l">
+              <a:lnSpc>
+                <a:spcPct val="100000"/>
+              </a:lnSpc>
+            </a:pPr>
             <a:r>
               <a:rPr sz="900" b="0">
-                <a:solidFill>
-                  <a:srgbClr val="FFFFFF"/>
-                </a:solidFill>
-                <a:latin typeface="Calibri"/>
-              </a:rPr>
-              <a:t>~9 FPS effective</a:t>
-            </a:r>
-          </a:p>
-          <a:p>
-            <a:pPr algn="l"/>
-            <a:r>
-              <a:rPr sz="800" b="0">
                 <a:solidFill>
                   <a:srgbClr val="DDE6F0"/>
                 </a:solidFill>
@@ -3945,7 +4020,7 @@
         </p:nvSpPr>
         <p:spPr>
           <a:xfrm>
-            <a:off x="4160520" y="4983479"/>
+            <a:off x="4160520" y="5010912"/>
             <a:ext cx="548640" cy="228600"/>
           </a:xfrm>
           <a:prstGeom prst="rect">
@@ -3980,7 +4055,7 @@
         </p:nvSpPr>
         <p:spPr>
           <a:xfrm>
-            <a:off x="4846320" y="3193541"/>
+            <a:off x="4846320" y="3193542"/>
             <a:ext cx="457200" cy="1744218"/>
           </a:xfrm>
           <a:prstGeom prst="rect">
@@ -4023,7 +4098,7 @@
         </p:nvSpPr>
         <p:spPr>
           <a:xfrm>
-            <a:off x="4800600" y="2873501"/>
+            <a:off x="4800600" y="2873502"/>
             <a:ext cx="548640" cy="274320"/>
           </a:xfrm>
           <a:prstGeom prst="rect">
@@ -4058,7 +4133,7 @@
         </p:nvSpPr>
         <p:spPr>
           <a:xfrm>
-            <a:off x="4800600" y="4983479"/>
+            <a:off x="4800600" y="5010912"/>
             <a:ext cx="548640" cy="228600"/>
           </a:xfrm>
           <a:prstGeom prst="rect">
@@ -4093,7 +4168,7 @@
         </p:nvSpPr>
         <p:spPr>
           <a:xfrm>
-            <a:off x="3703320" y="5394960"/>
+            <a:off x="3703320" y="5349240"/>
             <a:ext cx="1737360" cy="274320"/>
           </a:xfrm>
           <a:prstGeom prst="rect">
@@ -5386,7 +5461,7 @@
         <p:spPr>
           <a:xfrm>
             <a:off x="365760" y="1005840"/>
-            <a:ext cx="5303520" cy="5669280"/>
+            <a:ext cx="5303520" cy="3520440"/>
           </a:xfrm>
           <a:prstGeom prst="rect">
             <a:avLst/>
@@ -5422,16 +5497,16 @@
       </p:sp>
       <p:sp>
         <p:nvSpPr>
-          <p:cNvPr id="4" name="Right Triangle 3"/>
+          <p:cNvPr id="4" name="Isosceles Triangle 3"/>
           <p:cNvSpPr/>
           <p:nvPr/>
         </p:nvSpPr>
         <p:spPr>
-          <a:xfrm rot="1800000">
-            <a:off x="2560320" y="3383280"/>
-            <a:ext cx="914400" cy="914400"/>
-          </a:xfrm>
-          <a:prstGeom prst="rtTriangle">
+          <a:xfrm rot="5400000">
+            <a:off x="2514600" y="2263140"/>
+            <a:ext cx="1005840" cy="1005840"/>
+          </a:xfrm>
+          <a:prstGeom prst="triangle">
             <a:avLst/>
           </a:prstGeom>
           <a:solidFill>
@@ -5471,7 +5546,7 @@
         </p:nvSpPr>
         <p:spPr>
           <a:xfrm>
-            <a:off x="365760" y="4389120"/>
+            <a:off x="365760" y="3268980"/>
             <a:ext cx="5303520" cy="274320"/>
           </a:xfrm>
           <a:prstGeom prst="rect">
@@ -5506,7 +5581,7 @@
         </p:nvSpPr>
         <p:spPr>
           <a:xfrm>
-            <a:off x="365760" y="4709160"/>
+            <a:off x="365760" y="3543300"/>
             <a:ext cx="5303520" cy="228600"/>
           </a:xfrm>
           <a:prstGeom prst="rect">
@@ -5535,14 +5610,57 @@
       </p:sp>
       <p:sp>
         <p:nvSpPr>
-          <p:cNvPr id="7" name="TextBox 6"/>
+          <p:cNvPr id="7" name="Rectangle 6"/>
+          <p:cNvSpPr/>
+          <p:nvPr/>
+        </p:nvSpPr>
+        <p:spPr>
+          <a:xfrm>
+            <a:off x="365760" y="4663440"/>
+            <a:ext cx="5303520" cy="2148840"/>
+          </a:xfrm>
+          <a:prstGeom prst="rect">
+            <a:avLst/>
+          </a:prstGeom>
+          <a:solidFill>
+            <a:srgbClr val="F8F9FA"/>
+          </a:solidFill>
+          <a:ln w="9525">
+            <a:solidFill>
+              <a:srgbClr val="E0E0E0"/>
+            </a:solidFill>
+          </a:ln>
+        </p:spPr>
+        <p:style>
+          <a:lnRef idx="1">
+            <a:schemeClr val="accent1"/>
+          </a:lnRef>
+          <a:fillRef idx="3">
+            <a:schemeClr val="accent1"/>
+          </a:fillRef>
+          <a:effectRef idx="2">
+            <a:schemeClr val="accent1"/>
+          </a:effectRef>
+          <a:fontRef idx="minor">
+            <a:schemeClr val="lt1"/>
+          </a:fontRef>
+        </p:style>
+        <p:txBody>
+          <a:bodyPr rtlCol="0" anchor="ctr" lIns="0" rIns="0" tIns="0" bIns="0"/>
+          <a:lstStyle/>
+          <a:p/>
+        </p:txBody>
+      </p:sp>
+      <p:sp>
+        <p:nvSpPr>
+          <p:cNvPr id="8" name="TextBox 7"/>
           <p:cNvSpPr txBox="1"/>
           <p:nvPr/>
         </p:nvSpPr>
         <p:spPr>
           <a:xfrm>
-            <a:off x="5943600" y="1005840"/>
-            <a:ext cx="5943600" cy="320040"/>
+            <a:off x="502920" y="4736592"/>
+            <a:ext cx="5029200" cy="274320"/>
           </a:xfrm>
           <a:prstGeom prst="rect">
             <a:avLst/>
@@ -5557,27 +5675,27 @@
           <a:p>
             <a:pPr algn="l"/>
             <a:r>
-              <a:rPr sz="1600" b="1">
+              <a:rPr sz="1100" b="1">
                 <a:solidFill>
                   <a:srgbClr val="0070C0"/>
                 </a:solidFill>
                 <a:latin typeface="Calibri"/>
               </a:rPr>
-              <a:t>Sim2Real Ladder</a:t>
-            </a:r>
-          </a:p>
-        </p:txBody>
-      </p:sp>
-      <p:sp>
-        <p:nvSpPr>
-          <p:cNvPr id="8" name="TextBox 7"/>
+              <a:t>STACKABLE SIMULATION FLAGS</a:t>
+            </a:r>
+          </a:p>
+        </p:txBody>
+      </p:sp>
+      <p:sp>
+        <p:nvSpPr>
+          <p:cNvPr id="9" name="TextBox 8"/>
           <p:cNvSpPr txBox="1"/>
           <p:nvPr/>
         </p:nvSpPr>
         <p:spPr>
           <a:xfrm>
-            <a:off x="5943600" y="1325880"/>
-            <a:ext cx="5943600" cy="228600"/>
+            <a:off x="502920" y="5047488"/>
+            <a:ext cx="1645920" cy="219456"/>
           </a:xfrm>
           <a:prstGeom prst="rect">
             <a:avLst/>
@@ -5592,6 +5710,601 @@
           <a:p>
             <a:pPr algn="l"/>
             <a:r>
+              <a:rPr sz="1000" b="1">
+                <a:solidFill>
+                  <a:srgbClr val="0070C0"/>
+                </a:solidFill>
+                <a:latin typeface="Consolas"/>
+              </a:rPr>
+              <a:t>--sim-tilt</a:t>
+            </a:r>
+          </a:p>
+        </p:txBody>
+      </p:sp>
+      <p:sp>
+        <p:nvSpPr>
+          <p:cNvPr id="10" name="TextBox 9"/>
+          <p:cNvSpPr txBox="1"/>
+          <p:nvPr/>
+        </p:nvSpPr>
+        <p:spPr>
+          <a:xfrm>
+            <a:off x="2194560" y="5047488"/>
+            <a:ext cx="3291839" cy="219456"/>
+          </a:xfrm>
+          <a:prstGeom prst="rect">
+            <a:avLst/>
+          </a:prstGeom>
+          <a:noFill/>
+        </p:spPr>
+        <p:txBody>
+          <a:bodyPr wrap="square" lIns="45720" rIns="45720" tIns="27432" bIns="27432" anchor="t">
+            <a:spAutoFit/>
+          </a:bodyPr>
+          <a:lstStyle/>
+          <a:p>
+            <a:pPr algn="l"/>
+            <a:r>
+              <a:rPr sz="1000" b="0">
+                <a:solidFill>
+                  <a:srgbClr val="555555"/>
+                </a:solidFill>
+                <a:latin typeface="Calibri"/>
+              </a:rPr>
+              <a:t>Camera perspective (pitch/roll)</a:t>
+            </a:r>
+          </a:p>
+        </p:txBody>
+      </p:sp>
+      <p:sp>
+        <p:nvSpPr>
+          <p:cNvPr id="11" name="TextBox 10"/>
+          <p:cNvSpPr txBox="1"/>
+          <p:nvPr/>
+        </p:nvSpPr>
+        <p:spPr>
+          <a:xfrm>
+            <a:off x="502920" y="5266944"/>
+            <a:ext cx="1645920" cy="219456"/>
+          </a:xfrm>
+          <a:prstGeom prst="rect">
+            <a:avLst/>
+          </a:prstGeom>
+          <a:noFill/>
+        </p:spPr>
+        <p:txBody>
+          <a:bodyPr wrap="square" lIns="45720" rIns="45720" tIns="27432" bIns="27432" anchor="t">
+            <a:spAutoFit/>
+          </a:bodyPr>
+          <a:lstStyle/>
+          <a:p>
+            <a:pPr algn="l"/>
+            <a:r>
+              <a:rPr sz="1000" b="1">
+                <a:solidFill>
+                  <a:srgbClr val="0070C0"/>
+                </a:solidFill>
+                <a:latin typeface="Consolas"/>
+              </a:rPr>
+              <a:t>--shake N</a:t>
+            </a:r>
+          </a:p>
+        </p:txBody>
+      </p:sp>
+      <p:sp>
+        <p:nvSpPr>
+          <p:cNvPr id="12" name="TextBox 11"/>
+          <p:cNvSpPr txBox="1"/>
+          <p:nvPr/>
+        </p:nvSpPr>
+        <p:spPr>
+          <a:xfrm>
+            <a:off x="2194560" y="5266944"/>
+            <a:ext cx="3291839" cy="219456"/>
+          </a:xfrm>
+          <a:prstGeom prst="rect">
+            <a:avLst/>
+          </a:prstGeom>
+          <a:noFill/>
+        </p:spPr>
+        <p:txBody>
+          <a:bodyPr wrap="square" lIns="45720" rIns="45720" tIns="27432" bIns="27432" anchor="t">
+            <a:spAutoFit/>
+          </a:bodyPr>
+          <a:lstStyle/>
+          <a:p>
+            <a:pPr algn="l"/>
+            <a:r>
+              <a:rPr sz="1000" b="0">
+                <a:solidFill>
+                  <a:srgbClr val="555555"/>
+                </a:solidFill>
+                <a:latin typeface="Calibri"/>
+              </a:rPr>
+              <a:t>Pixel-level vibration jitter</a:t>
+            </a:r>
+          </a:p>
+        </p:txBody>
+      </p:sp>
+      <p:sp>
+        <p:nvSpPr>
+          <p:cNvPr id="13" name="TextBox 12"/>
+          <p:cNvSpPr txBox="1"/>
+          <p:nvPr/>
+        </p:nvSpPr>
+        <p:spPr>
+          <a:xfrm>
+            <a:off x="502920" y="5486400"/>
+            <a:ext cx="1645920" cy="219456"/>
+          </a:xfrm>
+          <a:prstGeom prst="rect">
+            <a:avLst/>
+          </a:prstGeom>
+          <a:noFill/>
+        </p:spPr>
+        <p:txBody>
+          <a:bodyPr wrap="square" lIns="45720" rIns="45720" tIns="27432" bIns="27432" anchor="t">
+            <a:spAutoFit/>
+          </a:bodyPr>
+          <a:lstStyle/>
+          <a:p>
+            <a:pPr algn="l"/>
+            <a:r>
+              <a:rPr sz="1000" b="1">
+                <a:solidFill>
+                  <a:srgbClr val="0070C0"/>
+                </a:solidFill>
+                <a:latin typeface="Consolas"/>
+              </a:rPr>
+              <a:t>--blur F</a:t>
+            </a:r>
+          </a:p>
+        </p:txBody>
+      </p:sp>
+      <p:sp>
+        <p:nvSpPr>
+          <p:cNvPr id="14" name="TextBox 13"/>
+          <p:cNvSpPr txBox="1"/>
+          <p:nvPr/>
+        </p:nvSpPr>
+        <p:spPr>
+          <a:xfrm>
+            <a:off x="2194560" y="5486400"/>
+            <a:ext cx="3291839" cy="219456"/>
+          </a:xfrm>
+          <a:prstGeom prst="rect">
+            <a:avLst/>
+          </a:prstGeom>
+          <a:noFill/>
+        </p:spPr>
+        <p:txBody>
+          <a:bodyPr wrap="square" lIns="45720" rIns="45720" tIns="27432" bIns="27432" anchor="t">
+            <a:spAutoFit/>
+          </a:bodyPr>
+          <a:lstStyle/>
+          <a:p>
+            <a:pPr algn="l"/>
+            <a:r>
+              <a:rPr sz="1000" b="0">
+                <a:solidFill>
+                  <a:srgbClr val="555555"/>
+                </a:solidFill>
+                <a:latin typeface="Calibri"/>
+              </a:rPr>
+              <a:t>Motion blur proportional to speed</a:t>
+            </a:r>
+          </a:p>
+        </p:txBody>
+      </p:sp>
+      <p:sp>
+        <p:nvSpPr>
+          <p:cNvPr id="15" name="TextBox 14"/>
+          <p:cNvSpPr txBox="1"/>
+          <p:nvPr/>
+        </p:nvSpPr>
+        <p:spPr>
+          <a:xfrm>
+            <a:off x="502920" y="5705856"/>
+            <a:ext cx="1645920" cy="219456"/>
+          </a:xfrm>
+          <a:prstGeom prst="rect">
+            <a:avLst/>
+          </a:prstGeom>
+          <a:noFill/>
+        </p:spPr>
+        <p:txBody>
+          <a:bodyPr wrap="square" lIns="45720" rIns="45720" tIns="27432" bIns="27432" anchor="t">
+            <a:spAutoFit/>
+          </a:bodyPr>
+          <a:lstStyle/>
+          <a:p>
+            <a:pPr algn="l"/>
+            <a:r>
+              <a:rPr sz="1000" b="1">
+                <a:solidFill>
+                  <a:srgbClr val="0070C0"/>
+                </a:solidFill>
+                <a:latin typeface="Consolas"/>
+              </a:rPr>
+              <a:t>--noise L</a:t>
+            </a:r>
+          </a:p>
+        </p:txBody>
+      </p:sp>
+      <p:sp>
+        <p:nvSpPr>
+          <p:cNvPr id="16" name="TextBox 15"/>
+          <p:cNvSpPr txBox="1"/>
+          <p:nvPr/>
+        </p:nvSpPr>
+        <p:spPr>
+          <a:xfrm>
+            <a:off x="2194560" y="5705856"/>
+            <a:ext cx="3291839" cy="219456"/>
+          </a:xfrm>
+          <a:prstGeom prst="rect">
+            <a:avLst/>
+          </a:prstGeom>
+          <a:noFill/>
+        </p:spPr>
+        <p:txBody>
+          <a:bodyPr wrap="square" lIns="45720" rIns="45720" tIns="27432" bIns="27432" anchor="t">
+            <a:spAutoFit/>
+          </a:bodyPr>
+          <a:lstStyle/>
+          <a:p>
+            <a:pPr algn="l"/>
+            <a:r>
+              <a:rPr sz="1000" b="0">
+                <a:solidFill>
+                  <a:srgbClr val="555555"/>
+                </a:solidFill>
+                <a:latin typeface="Calibri"/>
+              </a:rPr>
+              <a:t>GPS + attitude Gaussian noise</a:t>
+            </a:r>
+          </a:p>
+        </p:txBody>
+      </p:sp>
+      <p:sp>
+        <p:nvSpPr>
+          <p:cNvPr id="17" name="TextBox 16"/>
+          <p:cNvSpPr txBox="1"/>
+          <p:nvPr/>
+        </p:nvSpPr>
+        <p:spPr>
+          <a:xfrm>
+            <a:off x="502920" y="5925312"/>
+            <a:ext cx="1645920" cy="219456"/>
+          </a:xfrm>
+          <a:prstGeom prst="rect">
+            <a:avLst/>
+          </a:prstGeom>
+          <a:noFill/>
+        </p:spPr>
+        <p:txBody>
+          <a:bodyPr wrap="square" lIns="45720" rIns="45720" tIns="27432" bIns="27432" anchor="t">
+            <a:spAutoFit/>
+          </a:bodyPr>
+          <a:lstStyle/>
+          <a:p>
+            <a:pPr algn="l"/>
+            <a:r>
+              <a:rPr sz="1000" b="1">
+                <a:solidFill>
+                  <a:srgbClr val="E97132"/>
+                </a:solidFill>
+                <a:latin typeface="Consolas"/>
+              </a:rPr>
+              <a:t>--spiral</a:t>
+            </a:r>
+          </a:p>
+        </p:txBody>
+      </p:sp>
+      <p:sp>
+        <p:nvSpPr>
+          <p:cNvPr id="18" name="TextBox 17"/>
+          <p:cNvSpPr txBox="1"/>
+          <p:nvPr/>
+        </p:nvSpPr>
+        <p:spPr>
+          <a:xfrm>
+            <a:off x="2194560" y="5925312"/>
+            <a:ext cx="3291839" cy="219456"/>
+          </a:xfrm>
+          <a:prstGeom prst="rect">
+            <a:avLst/>
+          </a:prstGeom>
+          <a:noFill/>
+        </p:spPr>
+        <p:txBody>
+          <a:bodyPr wrap="square" lIns="45720" rIns="45720" tIns="27432" bIns="27432" anchor="t">
+            <a:spAutoFit/>
+          </a:bodyPr>
+          <a:lstStyle/>
+          <a:p>
+            <a:pPr algn="l"/>
+            <a:r>
+              <a:rPr sz="1000" b="0">
+                <a:solidFill>
+                  <a:srgbClr val="555555"/>
+                </a:solidFill>
+                <a:latin typeface="Calibri"/>
+              </a:rPr>
+              <a:t>Spiral search (vs lawnmower)</a:t>
+            </a:r>
+          </a:p>
+        </p:txBody>
+      </p:sp>
+      <p:sp>
+        <p:nvSpPr>
+          <p:cNvPr id="19" name="TextBox 18"/>
+          <p:cNvSpPr txBox="1"/>
+          <p:nvPr/>
+        </p:nvSpPr>
+        <p:spPr>
+          <a:xfrm>
+            <a:off x="502920" y="6144768"/>
+            <a:ext cx="1645920" cy="219456"/>
+          </a:xfrm>
+          <a:prstGeom prst="rect">
+            <a:avLst/>
+          </a:prstGeom>
+          <a:noFill/>
+        </p:spPr>
+        <p:txBody>
+          <a:bodyPr wrap="square" lIns="45720" rIns="45720" tIns="27432" bIns="27432" anchor="t">
+            <a:spAutoFit/>
+          </a:bodyPr>
+          <a:lstStyle/>
+          <a:p>
+            <a:pPr algn="l"/>
+            <a:r>
+              <a:rPr sz="1000" b="1">
+                <a:solidFill>
+                  <a:srgbClr val="E97132"/>
+                </a:solidFill>
+                <a:latin typeface="Consolas"/>
+              </a:rPr>
+              <a:t>--lock-yaw</a:t>
+            </a:r>
+          </a:p>
+        </p:txBody>
+      </p:sp>
+      <p:sp>
+        <p:nvSpPr>
+          <p:cNvPr id="20" name="TextBox 19"/>
+          <p:cNvSpPr txBox="1"/>
+          <p:nvPr/>
+        </p:nvSpPr>
+        <p:spPr>
+          <a:xfrm>
+            <a:off x="2194560" y="6144768"/>
+            <a:ext cx="3291839" cy="219456"/>
+          </a:xfrm>
+          <a:prstGeom prst="rect">
+            <a:avLst/>
+          </a:prstGeom>
+          <a:noFill/>
+        </p:spPr>
+        <p:txBody>
+          <a:bodyPr wrap="square" lIns="45720" rIns="45720" tIns="27432" bIns="27432" anchor="t">
+            <a:spAutoFit/>
+          </a:bodyPr>
+          <a:lstStyle/>
+          <a:p>
+            <a:pPr algn="l"/>
+            <a:r>
+              <a:rPr sz="1000" b="0">
+                <a:solidFill>
+                  <a:srgbClr val="555555"/>
+                </a:solidFill>
+                <a:latin typeface="Calibri"/>
+              </a:rPr>
+              <a:t>Maintain heading during sweep</a:t>
+            </a:r>
+          </a:p>
+        </p:txBody>
+      </p:sp>
+      <p:sp>
+        <p:nvSpPr>
+          <p:cNvPr id="21" name="TextBox 20"/>
+          <p:cNvSpPr txBox="1"/>
+          <p:nvPr/>
+        </p:nvSpPr>
+        <p:spPr>
+          <a:xfrm>
+            <a:off x="502920" y="6364224"/>
+            <a:ext cx="1645920" cy="219456"/>
+          </a:xfrm>
+          <a:prstGeom prst="rect">
+            <a:avLst/>
+          </a:prstGeom>
+          <a:noFill/>
+        </p:spPr>
+        <p:txBody>
+          <a:bodyPr wrap="square" lIns="45720" rIns="45720" tIns="27432" bIns="27432" anchor="t">
+            <a:spAutoFit/>
+          </a:bodyPr>
+          <a:lstStyle/>
+          <a:p>
+            <a:pPr algn="l"/>
+            <a:r>
+              <a:rPr sz="1000" b="1">
+                <a:solidFill>
+                  <a:srgbClr val="27AE60"/>
+                </a:solidFill>
+                <a:latin typeface="Consolas"/>
+              </a:rPr>
+              <a:t>--smart-detect</a:t>
+            </a:r>
+          </a:p>
+        </p:txBody>
+      </p:sp>
+      <p:sp>
+        <p:nvSpPr>
+          <p:cNvPr id="22" name="TextBox 21"/>
+          <p:cNvSpPr txBox="1"/>
+          <p:nvPr/>
+        </p:nvSpPr>
+        <p:spPr>
+          <a:xfrm>
+            <a:off x="2194560" y="6364224"/>
+            <a:ext cx="3291839" cy="219456"/>
+          </a:xfrm>
+          <a:prstGeom prst="rect">
+            <a:avLst/>
+          </a:prstGeom>
+          <a:noFill/>
+        </p:spPr>
+        <p:txBody>
+          <a:bodyPr wrap="square" lIns="45720" rIns="45720" tIns="27432" bIns="27432" anchor="t">
+            <a:spAutoFit/>
+          </a:bodyPr>
+          <a:lstStyle/>
+          <a:p>
+            <a:pPr algn="l"/>
+            <a:r>
+              <a:rPr sz="1000" b="0">
+                <a:solidFill>
+                  <a:srgbClr val="555555"/>
+                </a:solidFill>
+                <a:latin typeface="Calibri"/>
+              </a:rPr>
+              <a:t>Require consecutive confirms</a:t>
+            </a:r>
+          </a:p>
+        </p:txBody>
+      </p:sp>
+      <p:sp>
+        <p:nvSpPr>
+          <p:cNvPr id="23" name="TextBox 22"/>
+          <p:cNvSpPr txBox="1"/>
+          <p:nvPr/>
+        </p:nvSpPr>
+        <p:spPr>
+          <a:xfrm>
+            <a:off x="502920" y="6583680"/>
+            <a:ext cx="1645920" cy="219456"/>
+          </a:xfrm>
+          <a:prstGeom prst="rect">
+            <a:avLst/>
+          </a:prstGeom>
+          <a:noFill/>
+        </p:spPr>
+        <p:txBody>
+          <a:bodyPr wrap="square" lIns="45720" rIns="45720" tIns="27432" bIns="27432" anchor="t">
+            <a:spAutoFit/>
+          </a:bodyPr>
+          <a:lstStyle/>
+          <a:p>
+            <a:pPr algn="l"/>
+            <a:r>
+              <a:rPr sz="1000" b="1">
+                <a:solidFill>
+                  <a:srgbClr val="27AE60"/>
+                </a:solidFill>
+                <a:latin typeface="Consolas"/>
+              </a:rPr>
+              <a:t>--center-verify</a:t>
+            </a:r>
+          </a:p>
+        </p:txBody>
+      </p:sp>
+      <p:sp>
+        <p:nvSpPr>
+          <p:cNvPr id="24" name="TextBox 23"/>
+          <p:cNvSpPr txBox="1"/>
+          <p:nvPr/>
+        </p:nvSpPr>
+        <p:spPr>
+          <a:xfrm>
+            <a:off x="2194560" y="6583680"/>
+            <a:ext cx="3291839" cy="219456"/>
+          </a:xfrm>
+          <a:prstGeom prst="rect">
+            <a:avLst/>
+          </a:prstGeom>
+          <a:noFill/>
+        </p:spPr>
+        <p:txBody>
+          <a:bodyPr wrap="square" lIns="45720" rIns="45720" tIns="27432" bIns="27432" anchor="t">
+            <a:spAutoFit/>
+          </a:bodyPr>
+          <a:lstStyle/>
+          <a:p>
+            <a:pPr algn="l"/>
+            <a:r>
+              <a:rPr sz="1000" b="0">
+                <a:solidFill>
+                  <a:srgbClr val="555555"/>
+                </a:solidFill>
+                <a:latin typeface="Calibri"/>
+              </a:rPr>
+              <a:t>Hover GPS average at target</a:t>
+            </a:r>
+          </a:p>
+        </p:txBody>
+      </p:sp>
+      <p:sp>
+        <p:nvSpPr>
+          <p:cNvPr id="25" name="TextBox 24"/>
+          <p:cNvSpPr txBox="1"/>
+          <p:nvPr/>
+        </p:nvSpPr>
+        <p:spPr>
+          <a:xfrm>
+            <a:off x="5943600" y="1005840"/>
+            <a:ext cx="5943600" cy="320040"/>
+          </a:xfrm>
+          <a:prstGeom prst="rect">
+            <a:avLst/>
+          </a:prstGeom>
+          <a:noFill/>
+        </p:spPr>
+        <p:txBody>
+          <a:bodyPr wrap="square" lIns="45720" rIns="45720" tIns="27432" bIns="27432" anchor="t">
+            <a:spAutoFit/>
+          </a:bodyPr>
+          <a:lstStyle/>
+          <a:p>
+            <a:pPr algn="l"/>
+            <a:r>
+              <a:rPr sz="1600" b="1">
+                <a:solidFill>
+                  <a:srgbClr val="0070C0"/>
+                </a:solidFill>
+                <a:latin typeface="Calibri"/>
+              </a:rPr>
+              <a:t>Sim2Real Ladder</a:t>
+            </a:r>
+          </a:p>
+        </p:txBody>
+      </p:sp>
+      <p:sp>
+        <p:nvSpPr>
+          <p:cNvPr id="26" name="TextBox 25"/>
+          <p:cNvSpPr txBox="1"/>
+          <p:nvPr/>
+        </p:nvSpPr>
+        <p:spPr>
+          <a:xfrm>
+            <a:off x="5943600" y="1325880"/>
+            <a:ext cx="5943600" cy="228600"/>
+          </a:xfrm>
+          <a:prstGeom prst="rect">
+            <a:avLst/>
+          </a:prstGeom>
+          <a:noFill/>
+        </p:spPr>
+        <p:txBody>
+          <a:bodyPr wrap="square" lIns="45720" rIns="45720" tIns="27432" bIns="27432" anchor="t">
+            <a:spAutoFit/>
+          </a:bodyPr>
+          <a:lstStyle/>
+          <a:p>
+            <a:pPr algn="l"/>
+            <a:r>
               <a:rPr sz="900" b="0">
                 <a:solidFill>
                   <a:srgbClr val="888888"/>
@@ -5605,7 +6318,7 @@
       </p:sp>
       <p:sp>
         <p:nvSpPr>
-          <p:cNvPr id="9" name="Rectangle 8"/>
+          <p:cNvPr id="27" name="Rectangle 26"/>
           <p:cNvSpPr/>
           <p:nvPr/>
         </p:nvSpPr>
@@ -5648,7 +6361,7 @@
       </p:sp>
       <p:sp>
         <p:nvSpPr>
-          <p:cNvPr id="10" name="TextBox 9"/>
+          <p:cNvPr id="28" name="TextBox 27"/>
           <p:cNvSpPr txBox="1"/>
           <p:nvPr/>
         </p:nvSpPr>
@@ -5683,7 +6396,7 @@
       </p:sp>
       <p:sp>
         <p:nvSpPr>
-          <p:cNvPr id="11" name="TextBox 10"/>
+          <p:cNvPr id="29" name="TextBox 28"/>
           <p:cNvSpPr txBox="1"/>
           <p:nvPr/>
         </p:nvSpPr>
@@ -5718,7 +6431,7 @@
       </p:sp>
       <p:sp>
         <p:nvSpPr>
-          <p:cNvPr id="12" name="TextBox 11"/>
+          <p:cNvPr id="30" name="TextBox 29"/>
           <p:cNvSpPr txBox="1"/>
           <p:nvPr/>
         </p:nvSpPr>
@@ -5753,7 +6466,7 @@
       </p:sp>
       <p:sp>
         <p:nvSpPr>
-          <p:cNvPr id="13" name="TextBox 12"/>
+          <p:cNvPr id="31" name="TextBox 30"/>
           <p:cNvSpPr txBox="1"/>
           <p:nvPr/>
         </p:nvSpPr>
@@ -5788,7 +6501,7 @@
       </p:sp>
       <p:sp>
         <p:nvSpPr>
-          <p:cNvPr id="14" name="TextBox 13"/>
+          <p:cNvPr id="32" name="TextBox 31"/>
           <p:cNvSpPr txBox="1"/>
           <p:nvPr/>
         </p:nvSpPr>
@@ -5823,7 +6536,7 @@
       </p:sp>
       <p:sp>
         <p:nvSpPr>
-          <p:cNvPr id="15" name="Rectangle 14"/>
+          <p:cNvPr id="33" name="Rectangle 32"/>
           <p:cNvSpPr/>
           <p:nvPr/>
         </p:nvSpPr>
@@ -5866,7 +6579,7 @@
       </p:sp>
       <p:sp>
         <p:nvSpPr>
-          <p:cNvPr id="16" name="TextBox 15"/>
+          <p:cNvPr id="34" name="TextBox 33"/>
           <p:cNvSpPr txBox="1"/>
           <p:nvPr/>
         </p:nvSpPr>
@@ -5901,7 +6614,7 @@
       </p:sp>
       <p:sp>
         <p:nvSpPr>
-          <p:cNvPr id="17" name="Rectangle 16"/>
+          <p:cNvPr id="35" name="Rectangle 34"/>
           <p:cNvSpPr/>
           <p:nvPr/>
         </p:nvSpPr>
@@ -5944,7 +6657,7 @@
       </p:sp>
       <p:sp>
         <p:nvSpPr>
-          <p:cNvPr id="18" name="TextBox 17"/>
+          <p:cNvPr id="36" name="TextBox 35"/>
           <p:cNvSpPr txBox="1"/>
           <p:nvPr/>
         </p:nvSpPr>
@@ -5979,7 +6692,7 @@
       </p:sp>
       <p:sp>
         <p:nvSpPr>
-          <p:cNvPr id="19" name="TextBox 18"/>
+          <p:cNvPr id="37" name="TextBox 36"/>
           <p:cNvSpPr txBox="1"/>
           <p:nvPr/>
         </p:nvSpPr>
@@ -6014,7 +6727,7 @@
       </p:sp>
       <p:sp>
         <p:nvSpPr>
-          <p:cNvPr id="20" name="Rectangle 19"/>
+          <p:cNvPr id="38" name="Rectangle 37"/>
           <p:cNvSpPr/>
           <p:nvPr/>
         </p:nvSpPr>
@@ -6057,7 +6770,7 @@
       </p:sp>
       <p:sp>
         <p:nvSpPr>
-          <p:cNvPr id="21" name="TextBox 20"/>
+          <p:cNvPr id="39" name="TextBox 38"/>
           <p:cNvSpPr txBox="1"/>
           <p:nvPr/>
         </p:nvSpPr>
@@ -6092,7 +6805,7 @@
       </p:sp>
       <p:sp>
         <p:nvSpPr>
-          <p:cNvPr id="22" name="TextBox 21"/>
+          <p:cNvPr id="40" name="TextBox 39"/>
           <p:cNvSpPr txBox="1"/>
           <p:nvPr/>
         </p:nvSpPr>
@@ -6127,7 +6840,7 @@
       </p:sp>
       <p:sp>
         <p:nvSpPr>
-          <p:cNvPr id="23" name="Rectangle 22"/>
+          <p:cNvPr id="41" name="Rectangle 40"/>
           <p:cNvSpPr/>
           <p:nvPr/>
         </p:nvSpPr>
@@ -6170,7 +6883,7 @@
       </p:sp>
       <p:sp>
         <p:nvSpPr>
-          <p:cNvPr id="24" name="TextBox 23"/>
+          <p:cNvPr id="42" name="TextBox 41"/>
           <p:cNvSpPr txBox="1"/>
           <p:nvPr/>
         </p:nvSpPr>
@@ -6205,7 +6918,7 @@
       </p:sp>
       <p:sp>
         <p:nvSpPr>
-          <p:cNvPr id="25" name="TextBox 24"/>
+          <p:cNvPr id="43" name="TextBox 42"/>
           <p:cNvSpPr txBox="1"/>
           <p:nvPr/>
         </p:nvSpPr>
@@ -6240,7 +6953,7 @@
       </p:sp>
       <p:sp>
         <p:nvSpPr>
-          <p:cNvPr id="26" name="TextBox 25"/>
+          <p:cNvPr id="44" name="TextBox 43"/>
           <p:cNvSpPr txBox="1"/>
           <p:nvPr/>
         </p:nvSpPr>
@@ -6275,7 +6988,7 @@
       </p:sp>
       <p:sp>
         <p:nvSpPr>
-          <p:cNvPr id="27" name="Rectangle 26"/>
+          <p:cNvPr id="45" name="Rectangle 44"/>
           <p:cNvSpPr/>
           <p:nvPr/>
         </p:nvSpPr>
@@ -6318,7 +7031,7 @@
       </p:sp>
       <p:sp>
         <p:nvSpPr>
-          <p:cNvPr id="28" name="TextBox 27"/>
+          <p:cNvPr id="46" name="TextBox 45"/>
           <p:cNvSpPr txBox="1"/>
           <p:nvPr/>
         </p:nvSpPr>
@@ -6353,7 +7066,7 @@
       </p:sp>
       <p:sp>
         <p:nvSpPr>
-          <p:cNvPr id="29" name="TextBox 28"/>
+          <p:cNvPr id="47" name="TextBox 46"/>
           <p:cNvSpPr txBox="1"/>
           <p:nvPr/>
         </p:nvSpPr>
@@ -6388,7 +7101,7 @@
       </p:sp>
       <p:sp>
         <p:nvSpPr>
-          <p:cNvPr id="30" name="TextBox 29"/>
+          <p:cNvPr id="48" name="TextBox 47"/>
           <p:cNvSpPr txBox="1"/>
           <p:nvPr/>
         </p:nvSpPr>
@@ -6423,7 +7136,7 @@
       </p:sp>
       <p:sp>
         <p:nvSpPr>
-          <p:cNvPr id="31" name="TextBox 30"/>
+          <p:cNvPr id="49" name="TextBox 48"/>
           <p:cNvSpPr txBox="1"/>
           <p:nvPr/>
         </p:nvSpPr>
@@ -6458,7 +7171,7 @@
       </p:sp>
       <p:sp>
         <p:nvSpPr>
-          <p:cNvPr id="32" name="Rectangle 31"/>
+          <p:cNvPr id="50" name="Rectangle 49"/>
           <p:cNvSpPr/>
           <p:nvPr/>
         </p:nvSpPr>
@@ -6501,7 +7214,7 @@
       </p:sp>
       <p:sp>
         <p:nvSpPr>
-          <p:cNvPr id="33" name="TextBox 32"/>
+          <p:cNvPr id="51" name="TextBox 50"/>
           <p:cNvSpPr txBox="1"/>
           <p:nvPr/>
         </p:nvSpPr>
@@ -6536,7 +7249,7 @@
       </p:sp>
       <p:sp>
         <p:nvSpPr>
-          <p:cNvPr id="34" name="Rectangle 33"/>
+          <p:cNvPr id="52" name="Rectangle 51"/>
           <p:cNvSpPr/>
           <p:nvPr/>
         </p:nvSpPr>
@@ -6579,7 +7292,7 @@
       </p:sp>
       <p:sp>
         <p:nvSpPr>
-          <p:cNvPr id="35" name="TextBox 34"/>
+          <p:cNvPr id="53" name="TextBox 52"/>
           <p:cNvSpPr txBox="1"/>
           <p:nvPr/>
         </p:nvSpPr>
@@ -6614,7 +7327,7 @@
       </p:sp>
       <p:sp>
         <p:nvSpPr>
-          <p:cNvPr id="36" name="TextBox 35"/>
+          <p:cNvPr id="54" name="TextBox 53"/>
           <p:cNvSpPr txBox="1"/>
           <p:nvPr/>
         </p:nvSpPr>
@@ -6649,7 +7362,7 @@
       </p:sp>
       <p:sp>
         <p:nvSpPr>
-          <p:cNvPr id="37" name="TextBox 36"/>
+          <p:cNvPr id="55" name="TextBox 54"/>
           <p:cNvSpPr txBox="1"/>
           <p:nvPr/>
         </p:nvSpPr>
@@ -6684,7 +7397,7 @@
       </p:sp>
       <p:sp>
         <p:nvSpPr>
-          <p:cNvPr id="38" name="Rectangle 37"/>
+          <p:cNvPr id="56" name="Rectangle 55"/>
           <p:cNvSpPr/>
           <p:nvPr/>
         </p:nvSpPr>
@@ -6727,7 +7440,7 @@
       </p:sp>
       <p:sp>
         <p:nvSpPr>
-          <p:cNvPr id="39" name="TextBox 38"/>
+          <p:cNvPr id="57" name="TextBox 56"/>
           <p:cNvSpPr txBox="1"/>
           <p:nvPr/>
         </p:nvSpPr>
@@ -6762,7 +7475,7 @@
       </p:sp>
       <p:sp>
         <p:nvSpPr>
-          <p:cNvPr id="40" name="TextBox 39"/>
+          <p:cNvPr id="58" name="TextBox 57"/>
           <p:cNvSpPr txBox="1"/>
           <p:nvPr/>
         </p:nvSpPr>
@@ -6797,7 +7510,7 @@
       </p:sp>
       <p:sp>
         <p:nvSpPr>
-          <p:cNvPr id="41" name="TextBox 40"/>
+          <p:cNvPr id="59" name="TextBox 58"/>
           <p:cNvSpPr txBox="1"/>
           <p:nvPr/>
         </p:nvSpPr>
@@ -6832,7 +7545,7 @@
       </p:sp>
       <p:sp>
         <p:nvSpPr>
-          <p:cNvPr id="42" name="TextBox 41"/>
+          <p:cNvPr id="60" name="TextBox 59"/>
           <p:cNvSpPr txBox="1"/>
           <p:nvPr/>
         </p:nvSpPr>
@@ -6867,7 +7580,7 @@
       </p:sp>
       <p:sp>
         <p:nvSpPr>
-          <p:cNvPr id="43" name="Rectangle 42"/>
+          <p:cNvPr id="61" name="Rectangle 60"/>
           <p:cNvSpPr/>
           <p:nvPr/>
         </p:nvSpPr>
@@ -6910,7 +7623,7 @@
       </p:sp>
       <p:sp>
         <p:nvSpPr>
-          <p:cNvPr id="44" name="TextBox 43"/>
+          <p:cNvPr id="62" name="TextBox 61"/>
           <p:cNvSpPr txBox="1"/>
           <p:nvPr/>
         </p:nvSpPr>
@@ -6945,7 +7658,7 @@
       </p:sp>
       <p:sp>
         <p:nvSpPr>
-          <p:cNvPr id="45" name="TextBox 44"/>
+          <p:cNvPr id="63" name="TextBox 62"/>
           <p:cNvSpPr txBox="1"/>
           <p:nvPr/>
         </p:nvSpPr>
@@ -6980,7 +7693,7 @@
       </p:sp>
       <p:sp>
         <p:nvSpPr>
-          <p:cNvPr id="46" name="TextBox 45"/>
+          <p:cNvPr id="64" name="TextBox 63"/>
           <p:cNvSpPr txBox="1"/>
           <p:nvPr/>
         </p:nvSpPr>
@@ -7067,7 +7780,7 @@
       </p:sp>
       <p:sp>
         <p:nvSpPr>
-          <p:cNvPr id="47" name="TextBox 46"/>
+          <p:cNvPr id="65" name="TextBox 64"/>
           <p:cNvSpPr txBox="1"/>
           <p:nvPr/>
         </p:nvSpPr>
@@ -7154,7 +7867,7 @@
       </p:sp>
       <p:sp>
         <p:nvSpPr>
-          <p:cNvPr id="48" name="TextBox 47"/>
+          <p:cNvPr id="66" name="TextBox 65"/>
           <p:cNvSpPr txBox="1"/>
           <p:nvPr/>
         </p:nvSpPr>
@@ -7189,7 +7902,7 @@
       </p:sp>
       <p:sp>
         <p:nvSpPr>
-          <p:cNvPr id="49" name="TextBox 48"/>
+          <p:cNvPr id="67" name="TextBox 66"/>
           <p:cNvSpPr txBox="1"/>
           <p:nvPr/>
         </p:nvSpPr>
